--- a/Makale1_Gorsel_Sunum.pptx
+++ b/Makale1_Gorsel_Sunum.pptx
@@ -11265,6 +11265,75 @@
               <a:t>24</a:t>
             </a:fld>
             <a:endParaRPr lang="tr-TR"/>
+          </a:p>
+        </p:txBody>
+      </p:sp>
+      <p:sp>
+        <p:nvSpPr>
+          <p:cNvPr id="7" name="Rounded Rectangle 6">
+            <a:hlinkClick r:id="rId2"/>
+          </p:cNvPr>
+          <p:cNvSpPr/>
+          <p:nvPr/>
+        </p:nvSpPr>
+        <p:spPr>
+          <a:xfrm>
+            <a:off x="457200" y="5257800"/>
+            <a:ext cx="7543800" cy="1005840"/>
+          </a:xfrm>
+          <a:prstGeom prst="roundRect">
+            <a:avLst>
+              <a:gd name="adj" fmla="val 20000"/>
+            </a:avLst>
+          </a:prstGeom>
+          <a:solidFill>
+            <a:srgbClr val="E36C0A"/>
+          </a:solidFill>
+          <a:ln>
+            <a:noFill/>
+          </a:ln>
+          <a:effectLst/>
+        </p:spPr>
+        <p:style>
+          <a:lnRef idx="1">
+            <a:schemeClr val="accent1"/>
+          </a:lnRef>
+          <a:fillRef idx="3">
+            <a:schemeClr val="accent1"/>
+          </a:fillRef>
+          <a:effectRef idx="2">
+            <a:schemeClr val="accent1"/>
+          </a:effectRef>
+          <a:fontRef idx="minor">
+            <a:schemeClr val="lt1"/>
+          </a:fontRef>
+        </p:style>
+        <p:txBody>
+          <a:bodyPr rtlCol="0" anchor="ctr" wrap="square"/>
+          <a:lstStyle/>
+          <a:p>
+            <a:pPr algn="ctr"/>
+            <a:r>
+              <a:rPr sz="2200" b="1">
+                <a:solidFill>
+                  <a:srgbClr val="FFFFFF"/>
+                </a:solidFill>
+                <a:latin typeface="Times New Roman"/>
+              </a:rPr>
+              <a:t>Makalenin tamamı bir tık uzağınızda</a:t>
+            </a:r>
+          </a:p>
+          <a:p>
+            <a:pPr algn="ctr"/>
+            <a:r>
+              <a:rPr sz="1800" b="0">
+                <a:solidFill>
+                  <a:srgbClr val="FFFFFF"/>
+                </a:solidFill>
+                <a:latin typeface="Times New Roman"/>
+              </a:rPr>
+              <a:t>Okumak için buraya tıklayın  ›</a:t>
+            </a:r>
           </a:p>
         </p:txBody>
       </p:sp>

--- a/Makale1_Gorsel_Sunum.pptx
+++ b/Makale1_Gorsel_Sunum.pptx
@@ -11287,10 +11287,12 @@
             </a:avLst>
           </a:prstGeom>
           <a:solidFill>
-            <a:srgbClr val="E36C0A"/>
+            <a:srgbClr val="FFF1E0"/>
           </a:solidFill>
-          <a:ln>
-            <a:noFill/>
+          <a:ln w="38100">
+            <a:solidFill>
+              <a:srgbClr val="E36C0A"/>
+            </a:solidFill>
           </a:ln>
           <a:effectLst/>
         </p:spPr>
@@ -11319,6 +11321,7 @@
                   <a:srgbClr val="FFFFFF"/>
                 </a:solidFill>
                 <a:latin typeface="Times New Roman"/>
+                <a:hlinkClick r:id="rId2"/>
               </a:rPr>
               <a:t>Makalenin tamamı bir tık uzağınızda</a:t>
             </a:r>
@@ -11331,6 +11334,7 @@
                   <a:srgbClr val="FFFFFF"/>
                 </a:solidFill>
                 <a:latin typeface="Times New Roman"/>
+                <a:hlinkClick r:id="rId2"/>
               </a:rPr>
               <a:t>Okumak için buraya tıklayın  ›</a:t>
             </a:r>

--- a/Makale1_Gorsel_Sunum.pptx
+++ b/Makale1_Gorsel_Sunum.pptx
@@ -11278,8 +11278,8 @@
         </p:nvSpPr>
         <p:spPr>
           <a:xfrm>
-            <a:off x="457200" y="5257800"/>
-            <a:ext cx="7543800" cy="1005840"/>
+            <a:off x="457200" y="5074920"/>
+            <a:ext cx="7543800" cy="1234440"/>
           </a:xfrm>
           <a:prstGeom prst="roundRect">
             <a:avLst>
@@ -11318,12 +11318,18 @@
             <a:r>
               <a:rPr sz="2200" b="1">
                 <a:solidFill>
-                  <a:srgbClr val="FFFFFF"/>
-                </a:solidFill>
-                <a:latin typeface="Times New Roman"/>
-                <a:hlinkClick r:id="rId2"/>
-              </a:rPr>
-              <a:t>Makalenin tamamı bir tık uzağınızda</a:t>
+                  <a:srgbClr val="000000"/>
+                </a:solidFill>
+                <a:latin typeface="Times New Roman"/>
+                <a:hlinkClick r:id="rId2">
+                  <a:extLst>
+                    <a:ext uri="{A12FA001-AC4F-418D-AE19-62706E023703}">
+                      <ahyp:hlinkClr xmlns:ahyp="http://schemas.microsoft.com/office/drawing/2018/hyperlinkcolor" val="tx"/>
+                    </a:ext>
+                  </a:extLst>
+                </a:hlinkClick>
+              </a:rPr>
+              <a:t>Makalenin tamamına buradan ulaşabilirsiniz</a:t>
             </a:r>
           </a:p>
           <a:p>
@@ -11331,12 +11337,37 @@
             <a:r>
               <a:rPr sz="1800" b="0">
                 <a:solidFill>
-                  <a:srgbClr val="FFFFFF"/>
-                </a:solidFill>
-                <a:latin typeface="Times New Roman"/>
-                <a:hlinkClick r:id="rId2"/>
-              </a:rPr>
-              <a:t>Okumak için buraya tıklayın  ›</a:t>
+                  <a:srgbClr val="000000"/>
+                </a:solidFill>
+                <a:latin typeface="Times New Roman"/>
+                <a:hlinkClick r:id="rId2">
+                  <a:extLst>
+                    <a:ext uri="{A12FA001-AC4F-418D-AE19-62706E023703}">
+                      <ahyp:hlinkClr xmlns:ahyp="http://schemas.microsoft.com/office/drawing/2018/hyperlinkcolor" val="tx"/>
+                    </a:ext>
+                  </a:extLst>
+                </a:hlinkClick>
+              </a:rPr>
+              <a:t>Makaleyi açmak için tıklayın  ›</a:t>
+            </a:r>
+          </a:p>
+          <a:p>
+            <a:pPr algn="ctr"/>
+            <a:r>
+              <a:rPr sz="1300">
+                <a:solidFill>
+                  <a:srgbClr val="000000"/>
+                </a:solidFill>
+                <a:latin typeface="Times New Roman"/>
+                <a:hlinkClick r:id="rId2">
+                  <a:extLst>
+                    <a:ext uri="{A12FA001-AC4F-418D-AE19-62706E023703}">
+                      <ahyp:hlinkClr xmlns:ahyp="http://schemas.microsoft.com/office/drawing/2018/hyperlinkcolor" val="tx"/>
+                    </a:ext>
+                  </a:extLst>
+                </a:hlinkClick>
+              </a:rPr>
+              <a:t>https://dergipark.org.tr/tr/pub/abuhsbd/article/366618</a:t>
             </a:r>
           </a:p>
         </p:txBody>
